--- a/Daniel_Rodriguez/Drodriguez.pptx
+++ b/Daniel_Rodriguez/Drodriguez.pptx
@@ -658,7 +658,7 @@
             </a:r>
             <a:r>
               <a:rPr lang="es-ES" b="1" dirty="0" err="1"/>
-              <a:t>TuID</a:t>
+              <a:t>drodriguez</a:t>
             </a:r>
             <a:r>
               <a:rPr lang="es-ES" dirty="0"/>
@@ -773,7 +773,11 @@
             </a:r>
             <a:r>
               <a:rPr lang="es-ES" dirty="0"/>
-              <a:t> donde se ha alojado el proyecto. El repositorio incluye la estructura de subdirectorios requerida y el documento de presentación final con todas las evidencias de la práctica.</a:t>
+              <a:t> donde se ha alojado el proyecto. El repositorio incluye la estructura de subdirectorios requerida y el documento de presentación final con todas las evidencias de la práctica. URL: </a:t>
+            </a:r>
+            <a:r>
+              <a:rPr lang="es-ES" b="1" u="sng" dirty="0"/>
+              <a:t>https://github.com/Drodrigue21/drodriguez-iso-examen</a:t>
             </a:r>
           </a:p>
         </p:txBody>
@@ -5245,31 +5249,35 @@
           </a:p>
         </p:txBody>
       </p:sp>
-      <p:sp>
-        <p:nvSpPr>
-          <p:cNvPr id="3" name="Marcador de contenido 2">
-            <a:extLst>
-              <a:ext uri="{FF2B5EF4-FFF2-40B4-BE49-F238E27FC236}">
-                <a16:creationId xmlns:a16="http://schemas.microsoft.com/office/drawing/2014/main" id="{32EDBC6B-5A0E-9D05-4030-EBA68E9BF9DF}"/>
-              </a:ext>
-            </a:extLst>
-          </p:cNvPr>
-          <p:cNvSpPr>
-            <a:spLocks noGrp="1"/>
-          </p:cNvSpPr>
+      <p:pic>
+        <p:nvPicPr>
+          <p:cNvPr id="5" name="Marcador de contenido 4">
+            <a:extLst>
+              <a:ext uri="{FF2B5EF4-FFF2-40B4-BE49-F238E27FC236}">
+                <a16:creationId xmlns:a16="http://schemas.microsoft.com/office/drawing/2014/main" id="{8B1FD712-A659-A09C-F41B-023E41214A83}"/>
+              </a:ext>
+            </a:extLst>
+          </p:cNvPr>
+          <p:cNvPicPr>
+            <a:picLocks noGrp="1" noChangeAspect="1"/>
+          </p:cNvPicPr>
           <p:nvPr>
             <p:ph idx="1"/>
           </p:nvPr>
-        </p:nvSpPr>
-        <p:spPr/>
-        <p:txBody>
-          <a:bodyPr/>
-          <a:lstStyle/>
-          <a:p>
-            <a:endParaRPr lang="es-ES"/>
-          </a:p>
-        </p:txBody>
-      </p:sp>
+        </p:nvPicPr>
+        <p:blipFill>
+          <a:blip r:embed="rId3"/>
+          <a:stretch>
+            <a:fillRect/>
+          </a:stretch>
+        </p:blipFill>
+        <p:spPr>
+          <a:xfrm>
+            <a:off x="623949" y="557541"/>
+            <a:ext cx="10616270" cy="5438413"/>
+          </a:xfrm>
+        </p:spPr>
+      </p:pic>
     </p:spTree>
     <p:extLst>
       <p:ext uri="{BB962C8B-B14F-4D97-AF65-F5344CB8AC3E}">
